--- a/reports/2026-10-22.pptx
+++ b/reports/2026-10-22.pptx
@@ -3382,11 +3382,11 @@
             <a:r>
               <a:rPr sz="2400" b="1">
                 <a:solidFill>
-                  <a:srgbClr val="198974"/>
-                </a:solidFill>
-                <a:latin typeface="Microsoft YaHei"/>
-              </a:rPr>
-              <a:t>0.03%</a:t>
+                  <a:srgbClr val="BF4040"/>
+                </a:solidFill>
+                <a:latin typeface="Microsoft YaHei"/>
+              </a:rPr>
+              <a:t>-0.14%</a:t>
             </a:r>
           </a:p>
         </p:txBody>
@@ -3533,7 +3533,7 @@
                 </a:solidFill>
                 <a:latin typeface="Microsoft YaHei"/>
               </a:rPr>
-              <a:t>-4.72%</a:t>
+              <a:t>-4.93%</a:t>
             </a:r>
           </a:p>
         </p:txBody>
@@ -4235,8 +4235,8 @@
         </p:nvSpPr>
         <p:spPr>
           <a:xfrm>
-            <a:off x="1336705" y="1792224"/>
-            <a:ext cx="1086454" cy="146304"/>
+            <a:off x="1097280" y="1792224"/>
+            <a:ext cx="1325880" cy="146304"/>
           </a:xfrm>
           <a:prstGeom prst="rect">
             <a:avLst/>
@@ -4299,7 +4299,7 @@
                 </a:solidFill>
                 <a:latin typeface="Microsoft YaHei"/>
               </a:rPr>
-              <a:t>-0.87%</a:t>
+              <a:t>-1.73%</a:t>
             </a:r>
           </a:p>
         </p:txBody>
@@ -4389,8 +4389,8 @@
         </p:nvSpPr>
         <p:spPr>
           <a:xfrm>
-            <a:off x="1581985" y="2176272"/>
-            <a:ext cx="841174" cy="146304"/>
+            <a:off x="1906920" y="2176272"/>
+            <a:ext cx="516239" cy="146304"/>
           </a:xfrm>
           <a:prstGeom prst="rect">
             <a:avLst/>
@@ -4544,7 +4544,7 @@
         <p:spPr>
           <a:xfrm>
             <a:off x="2423160" y="2560320"/>
-            <a:ext cx="1325880" cy="146304"/>
+            <a:ext cx="813709" cy="146304"/>
           </a:xfrm>
           <a:prstGeom prst="rect">
             <a:avLst/>
@@ -4586,7 +4586,7 @@
         </p:nvSpPr>
         <p:spPr>
           <a:xfrm>
-            <a:off x="3794759" y="2514600"/>
+            <a:off x="3282589" y="2514600"/>
             <a:ext cx="502920" cy="201168"/>
           </a:xfrm>
           <a:prstGeom prst="rect">
@@ -4698,7 +4698,7 @@
         <p:spPr>
           <a:xfrm>
             <a:off x="2423160" y="2944368"/>
-            <a:ext cx="21493" cy="146304"/>
+            <a:ext cx="18288" cy="146304"/>
           </a:xfrm>
           <a:prstGeom prst="rect">
             <a:avLst/>
@@ -4740,7 +4740,7 @@
         </p:nvSpPr>
         <p:spPr>
           <a:xfrm>
-            <a:off x="2490373" y="2898648"/>
+            <a:off x="2487168" y="2898648"/>
             <a:ext cx="502920" cy="201168"/>
           </a:xfrm>
           <a:prstGeom prst="rect">
@@ -4852,7 +4852,7 @@
         <p:spPr>
           <a:xfrm>
             <a:off x="2423160" y="3328415"/>
-            <a:ext cx="753223" cy="146304"/>
+            <a:ext cx="462262" cy="146304"/>
           </a:xfrm>
           <a:prstGeom prst="rect">
             <a:avLst/>
@@ -4894,7 +4894,7 @@
         </p:nvSpPr>
         <p:spPr>
           <a:xfrm>
-            <a:off x="3222103" y="3282696"/>
+            <a:off x="2931142" y="3282696"/>
             <a:ext cx="502920" cy="201168"/>
           </a:xfrm>
           <a:prstGeom prst="rect">
@@ -5039,8 +5039,8 @@
         </p:nvSpPr>
         <p:spPr>
           <a:xfrm>
-            <a:off x="4766923" y="1792224"/>
-            <a:ext cx="1268116" cy="146304"/>
+            <a:off x="4709160" y="1792224"/>
+            <a:ext cx="1325880" cy="146304"/>
           </a:xfrm>
           <a:prstGeom prst="rect">
             <a:avLst/>
@@ -5103,7 +5103,7 @@
                 </a:solidFill>
                 <a:latin typeface="Microsoft YaHei"/>
               </a:rPr>
-              <a:t>-2.31%</a:t>
+              <a:t>-2.85%</a:t>
             </a:r>
           </a:p>
         </p:txBody>
@@ -5193,8 +5193,8 @@
         </p:nvSpPr>
         <p:spPr>
           <a:xfrm>
-            <a:off x="4709160" y="2176272"/>
-            <a:ext cx="1325880" cy="146304"/>
+            <a:off x="4913895" y="2176272"/>
+            <a:ext cx="1121144" cy="146304"/>
           </a:xfrm>
           <a:prstGeom prst="rect">
             <a:avLst/>
@@ -5347,8 +5347,8 @@
         </p:nvSpPr>
         <p:spPr>
           <a:xfrm>
-            <a:off x="5691777" y="2560320"/>
-            <a:ext cx="343262" cy="146304"/>
+            <a:off x="5744782" y="2560320"/>
+            <a:ext cx="290257" cy="146304"/>
           </a:xfrm>
           <a:prstGeom prst="rect">
             <a:avLst/>
@@ -5501,8 +5501,8 @@
         </p:nvSpPr>
         <p:spPr>
           <a:xfrm>
-            <a:off x="5068557" y="2944368"/>
-            <a:ext cx="966482" cy="146304"/>
+            <a:off x="5217797" y="2944368"/>
+            <a:ext cx="817242" cy="146304"/>
           </a:xfrm>
           <a:prstGeom prst="rect">
             <a:avLst/>
@@ -5655,8 +5655,8 @@
         </p:nvSpPr>
         <p:spPr>
           <a:xfrm>
-            <a:off x="5034902" y="3328415"/>
-            <a:ext cx="1000137" cy="146304"/>
+            <a:off x="5189338" y="3328415"/>
+            <a:ext cx="845701" cy="146304"/>
           </a:xfrm>
           <a:prstGeom prst="rect">
             <a:avLst/>
@@ -5907,7 +5907,7 @@
                 </a:solidFill>
                 <a:latin typeface="Microsoft YaHei"/>
               </a:rPr>
-              <a:t>-7.62%</a:t>
+              <a:t>-8.65%</a:t>
             </a:r>
           </a:p>
         </p:txBody>
@@ -5997,8 +5997,8 @@
         </p:nvSpPr>
         <p:spPr>
           <a:xfrm>
-            <a:off x="8691602" y="2176272"/>
-            <a:ext cx="955317" cy="146304"/>
+            <a:off x="8805119" y="2176272"/>
+            <a:ext cx="841800" cy="146304"/>
           </a:xfrm>
           <a:prstGeom prst="rect">
             <a:avLst/>
@@ -6152,7 +6152,7 @@
         <p:spPr>
           <a:xfrm>
             <a:off x="9646919" y="2560320"/>
-            <a:ext cx="335930" cy="146304"/>
+            <a:ext cx="296012" cy="146304"/>
           </a:xfrm>
           <a:prstGeom prst="rect">
             <a:avLst/>
@@ -6194,7 +6194,7 @@
         </p:nvSpPr>
         <p:spPr>
           <a:xfrm>
-            <a:off x="10028570" y="2514600"/>
+            <a:off x="9988652" y="2514600"/>
             <a:ext cx="502920" cy="201168"/>
           </a:xfrm>
           <a:prstGeom prst="rect">
@@ -6305,8 +6305,8 @@
         </p:nvSpPr>
         <p:spPr>
           <a:xfrm>
-            <a:off x="8767442" y="2944368"/>
-            <a:ext cx="879477" cy="146304"/>
+            <a:off x="8871948" y="2944368"/>
+            <a:ext cx="774971" cy="146304"/>
           </a:xfrm>
           <a:prstGeom prst="rect">
             <a:avLst/>
@@ -6459,8 +6459,8 @@
         </p:nvSpPr>
         <p:spPr>
           <a:xfrm>
-            <a:off x="8362452" y="3328415"/>
-            <a:ext cx="1284467" cy="146304"/>
+            <a:off x="8515082" y="3328415"/>
+            <a:ext cx="1131837" cy="146304"/>
           </a:xfrm>
           <a:prstGeom prst="rect">
             <a:avLst/>
@@ -6761,7 +6761,7 @@
                 </a:solidFill>
                 <a:latin typeface="Microsoft YaHei"/>
               </a:rPr>
-              <a:t>1.5850</a:t>
+              <a:t>1.5576</a:t>
             </a:r>
           </a:p>
         </p:txBody>
@@ -6795,7 +6795,7 @@
                 </a:solidFill>
                 <a:latin typeface="Microsoft YaHei"/>
               </a:rPr>
-              <a:t>2026-10-21</a:t>
+              <a:t>2026-10-22</a:t>
             </a:r>
           </a:p>
         </p:txBody>
@@ -7626,7 +7626,7 @@
         <p:spPr>
           <a:xfrm>
             <a:off x="2788920" y="1737360"/>
-            <a:ext cx="1283006" cy="201168"/>
+            <a:ext cx="1393001" cy="201168"/>
           </a:xfrm>
           <a:prstGeom prst="rect">
             <a:avLst/>
@@ -7689,7 +7689,7 @@
                 </a:solidFill>
                 <a:latin typeface="Microsoft YaHei"/>
               </a:rPr>
-              <a:t>-16.78%</a:t>
+              <a:t>-18.22%</a:t>
             </a:r>
           </a:p>
         </p:txBody>
@@ -7737,7 +7737,7 @@
         <p:spPr>
           <a:xfrm>
             <a:off x="8549640" y="1737360"/>
-            <a:ext cx="1341671" cy="201168"/>
+            <a:ext cx="1351027" cy="201168"/>
           </a:xfrm>
           <a:prstGeom prst="rect">
             <a:avLst/>
@@ -7800,7 +7800,7 @@
                 </a:solidFill>
                 <a:latin typeface="Microsoft YaHei"/>
               </a:rPr>
-              <a:t>19.55%</a:t>
+              <a:t>19.68%</a:t>
             </a:r>
           </a:p>
         </p:txBody>
@@ -9108,7 +9108,7 @@
                 </a:solidFill>
                 <a:latin typeface="Microsoft YaHei"/>
               </a:rPr>
-              <a:t>2026-10-21</a:t>
+              <a:t>2026-10-22</a:t>
             </a:r>
           </a:p>
         </p:txBody>
